--- a/make_presentation/templates/templates/creative/_7.pptx
+++ b/make_presentation/templates/templates/creative/_7.pptx
@@ -73,19 +73,7 @@
               <a:rPr b="0" lang="en-US" sz="4400" spc="-1" strike="noStrike">
                 <a:latin typeface="Arial"/>
               </a:rPr>
-              <a:t>Click to </a:t>
-            </a:r>
-            <a:r>
-              <a:rPr b="0" lang="en-US" sz="4400" spc="-1" strike="noStrike">
-                <a:latin typeface="Arial"/>
-              </a:rPr>
-              <a:t>move </a:t>
-            </a:r>
-            <a:r>
-              <a:rPr b="0" lang="en-US" sz="4400" spc="-1" strike="noStrike">
-                <a:latin typeface="Arial"/>
-              </a:rPr>
-              <a:t>the slide</a:t>
+              <a:t>Click to move the slide</a:t>
             </a:r>
             <a:endParaRPr b="0" lang="en-US" sz="4400" spc="-1" strike="noStrike">
               <a:latin typeface="Arial"/>
@@ -125,13 +113,7 @@
               <a:rPr b="0" lang="en-US" sz="2000" spc="-1" strike="noStrike">
                 <a:latin typeface="Arial"/>
               </a:rPr>
-              <a:t>Click to edit the </a:t>
-            </a:r>
-            <a:r>
-              <a:rPr b="0" lang="en-US" sz="2000" spc="-1" strike="noStrike">
-                <a:latin typeface="Arial"/>
-              </a:rPr>
-              <a:t>notes format</a:t>
+              <a:t>Click to edit the notes format</a:t>
             </a:r>
             <a:endParaRPr b="0" lang="en-US" sz="2000" spc="-1" strike="noStrike">
               <a:latin typeface="Arial"/>
@@ -316,7 +298,7 @@
             <a:pPr algn="r">
               <a:buNone/>
             </a:pPr>
-            <a:fld id="{A6D514AF-DFDB-4E23-ADFD-36E269CC37FF}" type="slidenum">
+            <a:fld id="{C8AF74D8-193C-4B9F-8E38-5702489E4F6B}" type="slidenum">
               <a:rPr b="0" lang="en-US" sz="1400" spc="-1" strike="noStrike">
                 <a:latin typeface="Times New Roman"/>
               </a:rPr>
@@ -364,7 +346,7 @@
         <p:spPr>
           <a:xfrm>
             <a:off x="685800" y="1143000"/>
-            <a:ext cx="5485680" cy="3085560"/>
+            <a:ext cx="5485320" cy="3085200"/>
           </a:xfrm>
           <a:prstGeom prst="rect">
             <a:avLst/>
@@ -387,7 +369,7 @@
         <p:spPr>
           <a:xfrm>
             <a:off x="685800" y="4400640"/>
-            <a:ext cx="5485680" cy="3599640"/>
+            <a:ext cx="5485320" cy="3599280"/>
           </a:xfrm>
           <a:prstGeom prst="rect">
             <a:avLst/>
@@ -421,7 +403,7 @@
         <p:spPr>
           <a:xfrm>
             <a:off x="3884760" y="8685360"/>
-            <a:ext cx="2971080" cy="457920"/>
+            <a:ext cx="2970720" cy="457560"/>
           </a:xfrm>
           <a:prstGeom prst="rect">
             <a:avLst/>
@@ -453,7 +435,7 @@
               </a:lnSpc>
               <a:buNone/>
             </a:pPr>
-            <a:fld id="{62B2B6DF-5907-4326-ABAD-E6D50CC44C78}" type="slidenum">
+            <a:fld id="{34E589ED-3D28-4F1D-9F53-BEDA4C4D68F6}" type="slidenum">
               <a:rPr b="0" lang="ru-RU" sz="1200" spc="-1" strike="noStrike">
                 <a:latin typeface="Times New Roman"/>
               </a:rPr>
@@ -500,7 +482,7 @@
         <p:spPr>
           <a:xfrm>
             <a:off x="685800" y="1143000"/>
-            <a:ext cx="5485680" cy="3085560"/>
+            <a:ext cx="5485320" cy="3085200"/>
           </a:xfrm>
           <a:prstGeom prst="rect">
             <a:avLst/>
@@ -523,7 +505,7 @@
         <p:spPr>
           <a:xfrm>
             <a:off x="685800" y="4400640"/>
-            <a:ext cx="5485680" cy="3599640"/>
+            <a:ext cx="5485320" cy="3599280"/>
           </a:xfrm>
           <a:prstGeom prst="rect">
             <a:avLst/>
@@ -557,7 +539,7 @@
         <p:spPr>
           <a:xfrm>
             <a:off x="3884760" y="8685360"/>
-            <a:ext cx="2971080" cy="457920"/>
+            <a:ext cx="2970720" cy="457560"/>
           </a:xfrm>
           <a:prstGeom prst="rect">
             <a:avLst/>
@@ -589,7 +571,7 @@
               </a:lnSpc>
               <a:buNone/>
             </a:pPr>
-            <a:fld id="{BD4F75AB-37B0-41F0-8E6A-40C4743F3A43}" type="slidenum">
+            <a:fld id="{598D35A8-684F-43E1-BBFE-6A5991347528}" type="slidenum">
               <a:rPr b="0" lang="ru-RU" sz="1200" spc="-1" strike="noStrike">
                 <a:latin typeface="Times New Roman"/>
               </a:rPr>
@@ -657,7 +639,7 @@
         <p:txBody>
           <a:bodyPr/>
           <a:p>
-            <a:fld id="{B67980A3-6230-4D98-8A45-874FC8BBA481}" type="slidenum">
+            <a:fld id="{CC943925-FAB9-45EB-A187-255F8B4555C3}" type="slidenum">
               <a:t>&lt;#&gt;</a:t>
             </a:fld>
           </a:p>
@@ -719,7 +701,7 @@
         <p:spPr>
           <a:xfrm>
             <a:off x="1143000" y="841680"/>
-            <a:ext cx="6857280" cy="1789920"/>
+            <a:ext cx="6856920" cy="1789560"/>
           </a:xfrm>
           <a:prstGeom prst="rect">
             <a:avLst/>
@@ -756,7 +738,7 @@
         <p:spPr>
           <a:xfrm>
             <a:off x="457200" y="1203480"/>
-            <a:ext cx="8229240" cy="1422720"/>
+            <a:ext cx="8228880" cy="1422360"/>
           </a:xfrm>
           <a:prstGeom prst="rect">
             <a:avLst/>
@@ -789,8 +771,8 @@
         </p:nvSpPr>
         <p:spPr>
           <a:xfrm>
-            <a:off x="457200" y="2761920"/>
-            <a:ext cx="8229240" cy="1422720"/>
+            <a:off x="457200" y="2761200"/>
+            <a:ext cx="8228880" cy="1422360"/>
           </a:xfrm>
           <a:prstGeom prst="rect">
             <a:avLst/>
@@ -845,7 +827,7 @@
         <p:txBody>
           <a:bodyPr/>
           <a:p>
-            <a:fld id="{C4239496-FF5B-45AD-8DEA-DDC187EEFDBA}" type="slidenum">
+            <a:fld id="{FDB2D06A-813A-4FFA-A7BA-715A6509D00C}" type="slidenum">
               <a:t>&lt;#&gt;</a:t>
             </a:fld>
           </a:p>
@@ -907,7 +889,7 @@
         <p:spPr>
           <a:xfrm>
             <a:off x="1143000" y="841680"/>
-            <a:ext cx="6857280" cy="1789920"/>
+            <a:ext cx="6856920" cy="1789560"/>
           </a:xfrm>
           <a:prstGeom prst="rect">
             <a:avLst/>
@@ -944,7 +926,7 @@
         <p:spPr>
           <a:xfrm>
             <a:off x="457200" y="1203480"/>
-            <a:ext cx="4015800" cy="1422720"/>
+            <a:ext cx="4015440" cy="1422360"/>
           </a:xfrm>
           <a:prstGeom prst="rect">
             <a:avLst/>
@@ -977,8 +959,8 @@
         </p:nvSpPr>
         <p:spPr>
           <a:xfrm>
-            <a:off x="4674240" y="1203480"/>
-            <a:ext cx="4015800" cy="1422720"/>
+            <a:off x="4673880" y="1203480"/>
+            <a:ext cx="4015440" cy="1422360"/>
           </a:xfrm>
           <a:prstGeom prst="rect">
             <a:avLst/>
@@ -1011,8 +993,8 @@
         </p:nvSpPr>
         <p:spPr>
           <a:xfrm>
-            <a:off x="457200" y="2761920"/>
-            <a:ext cx="4015800" cy="1422720"/>
+            <a:off x="457200" y="2761200"/>
+            <a:ext cx="4015440" cy="1422360"/>
           </a:xfrm>
           <a:prstGeom prst="rect">
             <a:avLst/>
@@ -1045,8 +1027,8 @@
         </p:nvSpPr>
         <p:spPr>
           <a:xfrm>
-            <a:off x="4674240" y="2761920"/>
-            <a:ext cx="4015800" cy="1422720"/>
+            <a:off x="4673880" y="2761200"/>
+            <a:ext cx="4015440" cy="1422360"/>
           </a:xfrm>
           <a:prstGeom prst="rect">
             <a:avLst/>
@@ -1101,7 +1083,7 @@
         <p:txBody>
           <a:bodyPr/>
           <a:p>
-            <a:fld id="{F33EE9B8-0348-4CCB-85E8-E1D20DA44CF3}" type="slidenum">
+            <a:fld id="{5D649633-8448-4481-B946-738BFC5F56D3}" type="slidenum">
               <a:t>&lt;#&gt;</a:t>
             </a:fld>
           </a:p>
@@ -1163,7 +1145,7 @@
         <p:spPr>
           <a:xfrm>
             <a:off x="1143000" y="841680"/>
-            <a:ext cx="6857280" cy="1789920"/>
+            <a:ext cx="6856920" cy="1789560"/>
           </a:xfrm>
           <a:prstGeom prst="rect">
             <a:avLst/>
@@ -1200,7 +1182,7 @@
         <p:spPr>
           <a:xfrm>
             <a:off x="457200" y="1203480"/>
-            <a:ext cx="2649600" cy="1422720"/>
+            <a:ext cx="2649600" cy="1422360"/>
           </a:xfrm>
           <a:prstGeom prst="rect">
             <a:avLst/>
@@ -1234,7 +1216,7 @@
         <p:spPr>
           <a:xfrm>
             <a:off x="3239640" y="1203480"/>
-            <a:ext cx="2649600" cy="1422720"/>
+            <a:ext cx="2649600" cy="1422360"/>
           </a:xfrm>
           <a:prstGeom prst="rect">
             <a:avLst/>
@@ -1268,7 +1250,7 @@
         <p:spPr>
           <a:xfrm>
             <a:off x="6022080" y="1203480"/>
-            <a:ext cx="2649600" cy="1422720"/>
+            <a:ext cx="2649600" cy="1422360"/>
           </a:xfrm>
           <a:prstGeom prst="rect">
             <a:avLst/>
@@ -1301,8 +1283,8 @@
         </p:nvSpPr>
         <p:spPr>
           <a:xfrm>
-            <a:off x="457200" y="2761920"/>
-            <a:ext cx="2649600" cy="1422720"/>
+            <a:off x="457200" y="2761200"/>
+            <a:ext cx="2649600" cy="1422360"/>
           </a:xfrm>
           <a:prstGeom prst="rect">
             <a:avLst/>
@@ -1335,8 +1317,8 @@
         </p:nvSpPr>
         <p:spPr>
           <a:xfrm>
-            <a:off x="3239640" y="2761920"/>
-            <a:ext cx="2649600" cy="1422720"/>
+            <a:off x="3239640" y="2761200"/>
+            <a:ext cx="2649600" cy="1422360"/>
           </a:xfrm>
           <a:prstGeom prst="rect">
             <a:avLst/>
@@ -1369,8 +1351,8 @@
         </p:nvSpPr>
         <p:spPr>
           <a:xfrm>
-            <a:off x="6022080" y="2761920"/>
-            <a:ext cx="2649600" cy="1422720"/>
+            <a:off x="6022080" y="2761200"/>
+            <a:ext cx="2649600" cy="1422360"/>
           </a:xfrm>
           <a:prstGeom prst="rect">
             <a:avLst/>
@@ -1425,7 +1407,7 @@
         <p:txBody>
           <a:bodyPr/>
           <a:p>
-            <a:fld id="{0B6321D1-2C35-44B1-8979-1B72F3ECEFE7}" type="slidenum">
+            <a:fld id="{7AAD9D31-8CF0-47F6-9C25-6B61EAC234E3}" type="slidenum">
               <a:t>&lt;#&gt;</a:t>
             </a:fld>
           </a:p>
@@ -1487,7 +1469,7 @@
         <p:spPr>
           <a:xfrm>
             <a:off x="1143000" y="841680"/>
-            <a:ext cx="6857280" cy="1789920"/>
+            <a:ext cx="6856920" cy="1789560"/>
           </a:xfrm>
           <a:prstGeom prst="rect">
             <a:avLst/>
@@ -1524,7 +1506,7 @@
         <p:spPr>
           <a:xfrm>
             <a:off x="457200" y="1203480"/>
-            <a:ext cx="8229240" cy="2982960"/>
+            <a:ext cx="8228880" cy="2982600"/>
           </a:xfrm>
           <a:prstGeom prst="rect">
             <a:avLst/>
@@ -1582,7 +1564,7 @@
         <p:txBody>
           <a:bodyPr/>
           <a:p>
-            <a:fld id="{8B913A4D-D21A-4ECA-9AFE-78D3240206CA}" type="slidenum">
+            <a:fld id="{6B6AEE24-3E09-48F5-B103-A8391BE34846}" type="slidenum">
               <a:t>&lt;#&gt;</a:t>
             </a:fld>
           </a:p>
@@ -1644,7 +1626,7 @@
         <p:spPr>
           <a:xfrm>
             <a:off x="1143000" y="841680"/>
-            <a:ext cx="6857280" cy="1789920"/>
+            <a:ext cx="6856920" cy="1789560"/>
           </a:xfrm>
           <a:prstGeom prst="rect">
             <a:avLst/>
@@ -1681,7 +1663,7 @@
         <p:spPr>
           <a:xfrm>
             <a:off x="457200" y="1203480"/>
-            <a:ext cx="8229240" cy="2982960"/>
+            <a:ext cx="8228880" cy="2982600"/>
           </a:xfrm>
           <a:prstGeom prst="rect">
             <a:avLst/>
@@ -1736,7 +1718,7 @@
         <p:txBody>
           <a:bodyPr/>
           <a:p>
-            <a:fld id="{59828B30-BE86-46B9-9F1D-9FBF5E0106C6}" type="slidenum">
+            <a:fld id="{A0903A93-7D7E-4E4A-BB3D-A82BBF6C7E7D}" type="slidenum">
               <a:t>&lt;#&gt;</a:t>
             </a:fld>
           </a:p>
@@ -1798,7 +1780,7 @@
         <p:spPr>
           <a:xfrm>
             <a:off x="1143000" y="841680"/>
-            <a:ext cx="6857280" cy="1789920"/>
+            <a:ext cx="6856920" cy="1789560"/>
           </a:xfrm>
           <a:prstGeom prst="rect">
             <a:avLst/>
@@ -1835,7 +1817,7 @@
         <p:spPr>
           <a:xfrm>
             <a:off x="457200" y="1203480"/>
-            <a:ext cx="4015800" cy="2982960"/>
+            <a:ext cx="4015440" cy="2982600"/>
           </a:xfrm>
           <a:prstGeom prst="rect">
             <a:avLst/>
@@ -1868,8 +1850,8 @@
         </p:nvSpPr>
         <p:spPr>
           <a:xfrm>
-            <a:off x="4674240" y="1203480"/>
-            <a:ext cx="4015800" cy="2982960"/>
+            <a:off x="4673880" y="1203480"/>
+            <a:ext cx="4015440" cy="2982600"/>
           </a:xfrm>
           <a:prstGeom prst="rect">
             <a:avLst/>
@@ -1924,7 +1906,7 @@
         <p:txBody>
           <a:bodyPr/>
           <a:p>
-            <a:fld id="{93B67357-BD04-466A-8574-8DA3444CDDB0}" type="slidenum">
+            <a:fld id="{D8D0F511-FA4A-4650-81FC-BAFBB5197668}" type="slidenum">
               <a:t>&lt;#&gt;</a:t>
             </a:fld>
           </a:p>
@@ -1986,7 +1968,7 @@
         <p:spPr>
           <a:xfrm>
             <a:off x="1143000" y="841680"/>
-            <a:ext cx="6857280" cy="1789920"/>
+            <a:ext cx="6856920" cy="1789560"/>
           </a:xfrm>
           <a:prstGeom prst="rect">
             <a:avLst/>
@@ -2044,7 +2026,7 @@
         <p:txBody>
           <a:bodyPr/>
           <a:p>
-            <a:fld id="{6CD3FAB7-7877-4E35-9513-9B5CCF930B01}" type="slidenum">
+            <a:fld id="{15F2B2BE-33C7-44BC-A508-863EAEE0D4D0}" type="slidenum">
               <a:t>&lt;#&gt;</a:t>
             </a:fld>
           </a:p>
@@ -2106,7 +2088,7 @@
         <p:spPr>
           <a:xfrm>
             <a:off x="1143000" y="841680"/>
-            <a:ext cx="6857280" cy="8298360"/>
+            <a:ext cx="6856920" cy="8296560"/>
           </a:xfrm>
           <a:prstGeom prst="rect">
             <a:avLst/>
@@ -2164,7 +2146,7 @@
         <p:txBody>
           <a:bodyPr/>
           <a:p>
-            <a:fld id="{6A75661C-68D3-4D9C-882E-302AB22FAF07}" type="slidenum">
+            <a:fld id="{6D1375E9-1C3A-4BFF-90B2-9AD288C700FB}" type="slidenum">
               <a:t>&lt;#&gt;</a:t>
             </a:fld>
           </a:p>
@@ -2226,7 +2208,7 @@
         <p:spPr>
           <a:xfrm>
             <a:off x="1143000" y="841680"/>
-            <a:ext cx="6857280" cy="1789920"/>
+            <a:ext cx="6856920" cy="1789560"/>
           </a:xfrm>
           <a:prstGeom prst="rect">
             <a:avLst/>
@@ -2263,7 +2245,7 @@
         <p:spPr>
           <a:xfrm>
             <a:off x="457200" y="1203480"/>
-            <a:ext cx="4015800" cy="1422720"/>
+            <a:ext cx="4015440" cy="1422360"/>
           </a:xfrm>
           <a:prstGeom prst="rect">
             <a:avLst/>
@@ -2296,8 +2278,8 @@
         </p:nvSpPr>
         <p:spPr>
           <a:xfrm>
-            <a:off x="4674240" y="1203480"/>
-            <a:ext cx="4015800" cy="2982960"/>
+            <a:off x="4673880" y="1203480"/>
+            <a:ext cx="4015440" cy="2982600"/>
           </a:xfrm>
           <a:prstGeom prst="rect">
             <a:avLst/>
@@ -2330,8 +2312,8 @@
         </p:nvSpPr>
         <p:spPr>
           <a:xfrm>
-            <a:off x="457200" y="2761920"/>
-            <a:ext cx="4015800" cy="1422720"/>
+            <a:off x="457200" y="2761200"/>
+            <a:ext cx="4015440" cy="1422360"/>
           </a:xfrm>
           <a:prstGeom prst="rect">
             <a:avLst/>
@@ -2386,7 +2368,7 @@
         <p:txBody>
           <a:bodyPr/>
           <a:p>
-            <a:fld id="{F9D02878-C3EF-4C19-AEAF-00EFCA524CDE}" type="slidenum">
+            <a:fld id="{12CC5441-C707-4BDC-8DC8-CBF47EAFFA04}" type="slidenum">
               <a:t>&lt;#&gt;</a:t>
             </a:fld>
           </a:p>
@@ -2448,7 +2430,7 @@
         <p:spPr>
           <a:xfrm>
             <a:off x="1143000" y="841680"/>
-            <a:ext cx="6857280" cy="1789920"/>
+            <a:ext cx="6856920" cy="1789560"/>
           </a:xfrm>
           <a:prstGeom prst="rect">
             <a:avLst/>
@@ -2485,7 +2467,7 @@
         <p:spPr>
           <a:xfrm>
             <a:off x="457200" y="1203480"/>
-            <a:ext cx="4015800" cy="2982960"/>
+            <a:ext cx="4015440" cy="2982600"/>
           </a:xfrm>
           <a:prstGeom prst="rect">
             <a:avLst/>
@@ -2518,8 +2500,8 @@
         </p:nvSpPr>
         <p:spPr>
           <a:xfrm>
-            <a:off x="4674240" y="1203480"/>
-            <a:ext cx="4015800" cy="1422720"/>
+            <a:off x="4673880" y="1203480"/>
+            <a:ext cx="4015440" cy="1422360"/>
           </a:xfrm>
           <a:prstGeom prst="rect">
             <a:avLst/>
@@ -2552,8 +2534,8 @@
         </p:nvSpPr>
         <p:spPr>
           <a:xfrm>
-            <a:off x="4674240" y="2761920"/>
-            <a:ext cx="4015800" cy="1422720"/>
+            <a:off x="4673880" y="2761200"/>
+            <a:ext cx="4015440" cy="1422360"/>
           </a:xfrm>
           <a:prstGeom prst="rect">
             <a:avLst/>
@@ -2608,7 +2590,7 @@
         <p:txBody>
           <a:bodyPr/>
           <a:p>
-            <a:fld id="{FE62182B-AF2B-49BE-BA56-BF387B1ED1E0}" type="slidenum">
+            <a:fld id="{B1CD73BA-EA8E-4A2E-9925-54876138B075}" type="slidenum">
               <a:t>&lt;#&gt;</a:t>
             </a:fld>
           </a:p>
@@ -2670,7 +2652,7 @@
         <p:spPr>
           <a:xfrm>
             <a:off x="1143000" y="841680"/>
-            <a:ext cx="6857280" cy="1789920"/>
+            <a:ext cx="6856920" cy="1789560"/>
           </a:xfrm>
           <a:prstGeom prst="rect">
             <a:avLst/>
@@ -2707,7 +2689,7 @@
         <p:spPr>
           <a:xfrm>
             <a:off x="457200" y="1203480"/>
-            <a:ext cx="4015800" cy="1422720"/>
+            <a:ext cx="4015440" cy="1422360"/>
           </a:xfrm>
           <a:prstGeom prst="rect">
             <a:avLst/>
@@ -2740,8 +2722,8 @@
         </p:nvSpPr>
         <p:spPr>
           <a:xfrm>
-            <a:off x="4674240" y="1203480"/>
-            <a:ext cx="4015800" cy="1422720"/>
+            <a:off x="4673880" y="1203480"/>
+            <a:ext cx="4015440" cy="1422360"/>
           </a:xfrm>
           <a:prstGeom prst="rect">
             <a:avLst/>
@@ -2774,8 +2756,8 @@
         </p:nvSpPr>
         <p:spPr>
           <a:xfrm>
-            <a:off x="457200" y="2761920"/>
-            <a:ext cx="8229240" cy="1422720"/>
+            <a:off x="457200" y="2761200"/>
+            <a:ext cx="8228880" cy="1422360"/>
           </a:xfrm>
           <a:prstGeom prst="rect">
             <a:avLst/>
@@ -2830,7 +2812,7 @@
         <p:txBody>
           <a:bodyPr/>
           <a:p>
-            <a:fld id="{D3CD5585-3BFB-4D46-A089-C823343CEF3D}" type="slidenum">
+            <a:fld id="{04CD587B-20C5-47EF-8786-A44387CFD487}" type="slidenum">
               <a:t>&lt;#&gt;</a:t>
             </a:fld>
           </a:p>
@@ -2899,7 +2881,7 @@
         <p:spPr>
           <a:xfrm>
             <a:off x="1143000" y="841680"/>
-            <a:ext cx="6857280" cy="1789920"/>
+            <a:ext cx="6856920" cy="1789560"/>
           </a:xfrm>
           <a:prstGeom prst="rect">
             <a:avLst/>
@@ -2918,13 +2900,7 @@
               <a:rPr b="0" lang="en-US" sz="1800" spc="-1" strike="noStrike">
                 <a:latin typeface="Arial"/>
               </a:rPr>
-              <a:t>Click to edit the title </a:t>
-            </a:r>
-            <a:r>
-              <a:rPr b="0" lang="en-US" sz="1800" spc="-1" strike="noStrike">
-                <a:latin typeface="Arial"/>
-              </a:rPr>
-              <a:t>text format</a:t>
+              <a:t>Click to edit the title text format</a:t>
             </a:r>
             <a:endParaRPr b="0" lang="en-US" sz="1800" spc="-1" strike="noStrike">
               <a:latin typeface="Arial"/>
@@ -2939,180 +2915,13 @@
             <a:spLocks noGrp="1"/>
           </p:cNvSpPr>
           <p:nvPr>
-            <p:ph type="ftr" idx="1"/>
-          </p:nvPr>
-        </p:nvSpPr>
-        <p:spPr>
-          <a:xfrm>
-            <a:off x="3029040" y="4767120"/>
-            <a:ext cx="3085560" cy="273240"/>
-          </a:xfrm>
-          <a:prstGeom prst="rect">
-            <a:avLst/>
-          </a:prstGeom>
-          <a:noFill/>
-          <a:ln w="0">
-            <a:noFill/>
-          </a:ln>
-        </p:spPr>
-        <p:txBody>
-          <a:bodyPr lIns="90000" rIns="90000" tIns="45000" bIns="45000" anchor="ctr">
-            <a:noAutofit/>
-          </a:bodyPr>
-          <a:lstStyle>
-            <a:lvl1pPr algn="ctr">
-              <a:lnSpc>
-                <a:spcPct val="100000"/>
-              </a:lnSpc>
-              <a:buNone/>
-              <a:defRPr b="0" lang="en-US" sz="1400" spc="-1" strike="noStrike">
-                <a:latin typeface="Times New Roman"/>
-              </a:defRPr>
-            </a:lvl1pPr>
-          </a:lstStyle>
-          <a:p>
-            <a:pPr algn="ctr">
-              <a:lnSpc>
-                <a:spcPct val="100000"/>
-              </a:lnSpc>
-              <a:buNone/>
-            </a:pPr>
-            <a:r>
-              <a:rPr b="0" lang="en-US" sz="1400" spc="-1" strike="noStrike">
-                <a:latin typeface="Times New Roman"/>
-              </a:rPr>
-              <a:t>&lt;footer&gt;</a:t>
-            </a:r>
-            <a:endParaRPr b="0" lang="en-US" sz="1400" spc="-1" strike="noStrike">
-              <a:latin typeface="Times New Roman"/>
-            </a:endParaRPr>
-          </a:p>
-        </p:txBody>
-      </p:sp>
-      <p:sp>
-        <p:nvSpPr>
-          <p:cNvPr id="2" name="PlaceHolder 3"/>
-          <p:cNvSpPr>
-            <a:spLocks noGrp="1"/>
-          </p:cNvSpPr>
-          <p:nvPr>
-            <p:ph type="sldNum" idx="2"/>
-          </p:nvPr>
-        </p:nvSpPr>
-        <p:spPr>
-          <a:xfrm>
-            <a:off x="6458040" y="4767120"/>
-            <a:ext cx="2056680" cy="273240"/>
-          </a:xfrm>
-          <a:prstGeom prst="rect">
-            <a:avLst/>
-          </a:prstGeom>
-          <a:noFill/>
-          <a:ln w="0">
-            <a:noFill/>
-          </a:ln>
-        </p:spPr>
-        <p:txBody>
-          <a:bodyPr lIns="90000" rIns="90000" tIns="45000" bIns="45000" anchor="ctr">
-            <a:noAutofit/>
-          </a:bodyPr>
-          <a:lstStyle>
-            <a:lvl1pPr algn="r">
-              <a:lnSpc>
-                <a:spcPct val="100000"/>
-              </a:lnSpc>
-              <a:buNone/>
-              <a:defRPr b="0" lang="en-US" sz="900" spc="-1" strike="noStrike">
-                <a:solidFill>
-                  <a:srgbClr val="8b8b8b"/>
-                </a:solidFill>
-                <a:latin typeface="Calibri"/>
-              </a:defRPr>
-            </a:lvl1pPr>
-          </a:lstStyle>
-          <a:p>
-            <a:pPr algn="r">
-              <a:lnSpc>
-                <a:spcPct val="100000"/>
-              </a:lnSpc>
-              <a:buNone/>
-            </a:pPr>
-            <a:fld id="{C5A08229-9ACE-42BD-89EA-D84D668DFD73}" type="slidenum">
-              <a:rPr b="0" lang="en-US" sz="900" spc="-1" strike="noStrike">
-                <a:solidFill>
-                  <a:srgbClr val="8b8b8b"/>
-                </a:solidFill>
-                <a:latin typeface="Calibri"/>
-              </a:rPr>
-              <a:t>&lt;number&gt;</a:t>
-            </a:fld>
-            <a:endParaRPr b="0" lang="en-US" sz="900" spc="-1" strike="noStrike">
-              <a:latin typeface="Times New Roman"/>
-            </a:endParaRPr>
-          </a:p>
-        </p:txBody>
-      </p:sp>
-      <p:sp>
-        <p:nvSpPr>
-          <p:cNvPr id="3" name="PlaceHolder 4"/>
-          <p:cNvSpPr>
-            <a:spLocks noGrp="1"/>
-          </p:cNvSpPr>
-          <p:nvPr>
-            <p:ph type="dt" idx="3"/>
-          </p:nvPr>
-        </p:nvSpPr>
-        <p:spPr>
-          <a:xfrm>
-            <a:off x="628560" y="4767120"/>
-            <a:ext cx="2056680" cy="273240"/>
-          </a:xfrm>
-          <a:prstGeom prst="rect">
-            <a:avLst/>
-          </a:prstGeom>
-          <a:noFill/>
-          <a:ln w="0">
-            <a:noFill/>
-          </a:ln>
-        </p:spPr>
-        <p:txBody>
-          <a:bodyPr lIns="90000" rIns="90000" tIns="45000" bIns="45000" anchor="ctr">
-            <a:noAutofit/>
-          </a:bodyPr>
-          <a:lstStyle>
-            <a:lvl1pPr>
-              <a:defRPr b="0" lang="en-US" sz="1400" spc="-1" strike="noStrike">
-                <a:latin typeface="Times New Roman"/>
-              </a:defRPr>
-            </a:lvl1pPr>
-          </a:lstStyle>
-          <a:p>
-            <a:r>
-              <a:rPr b="0" lang="en-US" sz="1400" spc="-1" strike="noStrike">
-                <a:latin typeface="Times New Roman"/>
-              </a:rPr>
-              <a:t>&lt;date/time&gt;</a:t>
-            </a:r>
-            <a:endParaRPr b="0" lang="en-US" sz="1400" spc="-1" strike="noStrike">
-              <a:latin typeface="Times New Roman"/>
-            </a:endParaRPr>
-          </a:p>
-        </p:txBody>
-      </p:sp>
-      <p:sp>
-        <p:nvSpPr>
-          <p:cNvPr id="4" name="PlaceHolder 5"/>
-          <p:cNvSpPr>
-            <a:spLocks noGrp="1"/>
-          </p:cNvSpPr>
-          <p:nvPr>
             <p:ph type="body"/>
           </p:nvPr>
         </p:nvSpPr>
         <p:spPr>
           <a:xfrm>
             <a:off x="457200" y="1203480"/>
-            <a:ext cx="8229240" cy="2982960"/>
+            <a:ext cx="8228880" cy="2982600"/>
           </a:xfrm>
           <a:prstGeom prst="rect">
             <a:avLst/>
@@ -3139,12 +2948,12 @@
               <a:buChar char=""/>
             </a:pPr>
             <a:r>
-              <a:rPr b="0" lang="en-US" sz="3200" spc="-1" strike="noStrike">
+              <a:rPr b="0" lang="en-US" sz="1800" spc="-1" strike="noStrike">
                 <a:latin typeface="Arial"/>
               </a:rPr>
               <a:t>Click to edit the outline text format</a:t>
             </a:r>
-            <a:endParaRPr b="0" lang="en-US" sz="3200" spc="-1" strike="noStrike">
+            <a:endParaRPr b="0" lang="en-US" sz="1800" spc="-1" strike="noStrike">
               <a:latin typeface="Arial"/>
             </a:endParaRPr>
           </a:p>
@@ -3161,12 +2970,12 @@
               <a:buChar char=""/>
             </a:pPr>
             <a:r>
-              <a:rPr b="0" lang="en-US" sz="2800" spc="-1" strike="noStrike">
+              <a:rPr b="0" lang="en-US" sz="1800" spc="-1" strike="noStrike">
                 <a:latin typeface="Arial"/>
               </a:rPr>
               <a:t>Second Outline Level</a:t>
             </a:r>
-            <a:endParaRPr b="0" lang="en-US" sz="2800" spc="-1" strike="noStrike">
+            <a:endParaRPr b="0" lang="en-US" sz="1800" spc="-1" strike="noStrike">
               <a:latin typeface="Arial"/>
             </a:endParaRPr>
           </a:p>
@@ -3183,12 +2992,12 @@
               <a:buChar char=""/>
             </a:pPr>
             <a:r>
-              <a:rPr b="0" lang="en-US" sz="2400" spc="-1" strike="noStrike">
+              <a:rPr b="0" lang="en-US" sz="1800" spc="-1" strike="noStrike">
                 <a:latin typeface="Arial"/>
               </a:rPr>
               <a:t>Third Outline Level</a:t>
             </a:r>
-            <a:endParaRPr b="0" lang="en-US" sz="2400" spc="-1" strike="noStrike">
+            <a:endParaRPr b="0" lang="en-US" sz="1800" spc="-1" strike="noStrike">
               <a:latin typeface="Arial"/>
             </a:endParaRPr>
           </a:p>
@@ -3205,12 +3014,12 @@
               <a:buChar char=""/>
             </a:pPr>
             <a:r>
-              <a:rPr b="0" lang="en-US" sz="2000" spc="-1" strike="noStrike">
+              <a:rPr b="0" lang="en-US" sz="1800" spc="-1" strike="noStrike">
                 <a:latin typeface="Arial"/>
               </a:rPr>
               <a:t>Fourth Outline Level</a:t>
             </a:r>
-            <a:endParaRPr b="0" lang="en-US" sz="2000" spc="-1" strike="noStrike">
+            <a:endParaRPr b="0" lang="en-US" sz="1800" spc="-1" strike="noStrike">
               <a:latin typeface="Arial"/>
             </a:endParaRPr>
           </a:p>
@@ -3227,12 +3036,12 @@
               <a:buChar char=""/>
             </a:pPr>
             <a:r>
-              <a:rPr b="0" lang="en-US" sz="2000" spc="-1" strike="noStrike">
+              <a:rPr b="0" lang="en-US" sz="1800" spc="-1" strike="noStrike">
                 <a:latin typeface="Arial"/>
               </a:rPr>
               <a:t>Fifth Outline Level</a:t>
             </a:r>
-            <a:endParaRPr b="0" lang="en-US" sz="2000" spc="-1" strike="noStrike">
+            <a:endParaRPr b="0" lang="en-US" sz="1800" spc="-1" strike="noStrike">
               <a:latin typeface="Arial"/>
             </a:endParaRPr>
           </a:p>
@@ -3249,12 +3058,12 @@
               <a:buChar char=""/>
             </a:pPr>
             <a:r>
-              <a:rPr b="0" lang="en-US" sz="2000" spc="-1" strike="noStrike">
+              <a:rPr b="0" lang="en-US" sz="1800" spc="-1" strike="noStrike">
                 <a:latin typeface="Arial"/>
               </a:rPr>
               <a:t>Sixth Outline Level</a:t>
             </a:r>
-            <a:endParaRPr b="0" lang="en-US" sz="2000" spc="-1" strike="noStrike">
+            <a:endParaRPr b="0" lang="en-US" sz="1800" spc="-1" strike="noStrike">
               <a:latin typeface="Arial"/>
             </a:endParaRPr>
           </a:p>
@@ -3271,13 +3080,180 @@
               <a:buChar char=""/>
             </a:pPr>
             <a:r>
-              <a:rPr b="0" lang="en-US" sz="2000" spc="-1" strike="noStrike">
+              <a:rPr b="0" lang="en-US" sz="1800" spc="-1" strike="noStrike">
                 <a:latin typeface="Arial"/>
               </a:rPr>
               <a:t>Seventh Outline Level</a:t>
             </a:r>
-            <a:endParaRPr b="0" lang="en-US" sz="2000" spc="-1" strike="noStrike">
-              <a:latin typeface="Arial"/>
+            <a:endParaRPr b="0" lang="en-US" sz="1800" spc="-1" strike="noStrike">
+              <a:latin typeface="Arial"/>
+            </a:endParaRPr>
+          </a:p>
+        </p:txBody>
+      </p:sp>
+      <p:sp>
+        <p:nvSpPr>
+          <p:cNvPr id="2" name="PlaceHolder 3"/>
+          <p:cNvSpPr>
+            <a:spLocks noGrp="1"/>
+          </p:cNvSpPr>
+          <p:nvPr>
+            <p:ph type="ftr" idx="1"/>
+          </p:nvPr>
+        </p:nvSpPr>
+        <p:spPr>
+          <a:xfrm>
+            <a:off x="3029040" y="4767120"/>
+            <a:ext cx="3085200" cy="272880"/>
+          </a:xfrm>
+          <a:prstGeom prst="rect">
+            <a:avLst/>
+          </a:prstGeom>
+          <a:noFill/>
+          <a:ln w="0">
+            <a:noFill/>
+          </a:ln>
+        </p:spPr>
+        <p:txBody>
+          <a:bodyPr lIns="90000" rIns="90000" tIns="45000" bIns="45000" anchor="ctr">
+            <a:noAutofit/>
+          </a:bodyPr>
+          <a:lstStyle>
+            <a:lvl1pPr algn="ctr">
+              <a:lnSpc>
+                <a:spcPct val="100000"/>
+              </a:lnSpc>
+              <a:buNone/>
+              <a:defRPr b="0" lang="en-US" sz="1400" spc="-1" strike="noStrike">
+                <a:latin typeface="Times New Roman"/>
+              </a:defRPr>
+            </a:lvl1pPr>
+          </a:lstStyle>
+          <a:p>
+            <a:pPr algn="ctr">
+              <a:lnSpc>
+                <a:spcPct val="100000"/>
+              </a:lnSpc>
+              <a:buNone/>
+            </a:pPr>
+            <a:r>
+              <a:rPr b="0" lang="en-US" sz="1400" spc="-1" strike="noStrike">
+                <a:latin typeface="Times New Roman"/>
+              </a:rPr>
+              <a:t>&lt;footer&gt;</a:t>
+            </a:r>
+            <a:endParaRPr b="0" lang="en-US" sz="1400" spc="-1" strike="noStrike">
+              <a:latin typeface="Times New Roman"/>
+            </a:endParaRPr>
+          </a:p>
+        </p:txBody>
+      </p:sp>
+      <p:sp>
+        <p:nvSpPr>
+          <p:cNvPr id="3" name="PlaceHolder 4"/>
+          <p:cNvSpPr>
+            <a:spLocks noGrp="1"/>
+          </p:cNvSpPr>
+          <p:nvPr>
+            <p:ph type="sldNum" idx="2"/>
+          </p:nvPr>
+        </p:nvSpPr>
+        <p:spPr>
+          <a:xfrm>
+            <a:off x="6458040" y="4767120"/>
+            <a:ext cx="2056320" cy="272880"/>
+          </a:xfrm>
+          <a:prstGeom prst="rect">
+            <a:avLst/>
+          </a:prstGeom>
+          <a:noFill/>
+          <a:ln w="0">
+            <a:noFill/>
+          </a:ln>
+        </p:spPr>
+        <p:txBody>
+          <a:bodyPr lIns="90000" rIns="90000" tIns="45000" bIns="45000" anchor="ctr">
+            <a:noAutofit/>
+          </a:bodyPr>
+          <a:lstStyle>
+            <a:lvl1pPr algn="r">
+              <a:lnSpc>
+                <a:spcPct val="100000"/>
+              </a:lnSpc>
+              <a:buNone/>
+              <a:defRPr b="0" lang="en-US" sz="900" spc="-1" strike="noStrike">
+                <a:solidFill>
+                  <a:srgbClr val="8b8b8b"/>
+                </a:solidFill>
+                <a:latin typeface="Calibri"/>
+              </a:defRPr>
+            </a:lvl1pPr>
+          </a:lstStyle>
+          <a:p>
+            <a:pPr algn="r">
+              <a:lnSpc>
+                <a:spcPct val="100000"/>
+              </a:lnSpc>
+              <a:buNone/>
+            </a:pPr>
+            <a:fld id="{9A77AD99-92A9-43D4-9698-0A444B438F75}" type="slidenum">
+              <a:rPr b="0" lang="en-US" sz="900" spc="-1" strike="noStrike">
+                <a:solidFill>
+                  <a:srgbClr val="8b8b8b"/>
+                </a:solidFill>
+                <a:latin typeface="Calibri"/>
+              </a:rPr>
+              <a:t>&lt;number&gt;</a:t>
+            </a:fld>
+            <a:endParaRPr b="0" lang="en-US" sz="900" spc="-1" strike="noStrike">
+              <a:latin typeface="Times New Roman"/>
+            </a:endParaRPr>
+          </a:p>
+        </p:txBody>
+      </p:sp>
+      <p:sp>
+        <p:nvSpPr>
+          <p:cNvPr id="4" name="PlaceHolder 5"/>
+          <p:cNvSpPr>
+            <a:spLocks noGrp="1"/>
+          </p:cNvSpPr>
+          <p:nvPr>
+            <p:ph type="dt" idx="3"/>
+          </p:nvPr>
+        </p:nvSpPr>
+        <p:spPr>
+          <a:xfrm>
+            <a:off x="628560" y="4767120"/>
+            <a:ext cx="2056320" cy="272880"/>
+          </a:xfrm>
+          <a:prstGeom prst="rect">
+            <a:avLst/>
+          </a:prstGeom>
+          <a:noFill/>
+          <a:ln w="0">
+            <a:noFill/>
+          </a:ln>
+        </p:spPr>
+        <p:txBody>
+          <a:bodyPr lIns="90000" rIns="90000" tIns="45000" bIns="45000" anchor="ctr">
+            <a:noAutofit/>
+          </a:bodyPr>
+          <a:lstStyle>
+            <a:lvl1pPr>
+              <a:defRPr b="0" lang="en-US" sz="1400" spc="-1" strike="noStrike">
+                <a:latin typeface="Times New Roman"/>
+              </a:defRPr>
+            </a:lvl1pPr>
+          </a:lstStyle>
+          <a:p>
+            <a:r>
+              <a:rPr b="0" lang="en-US" sz="1400" spc="-1" strike="noStrike">
+                <a:latin typeface="Times New Roman"/>
+              </a:rPr>
+              <a:t>&lt;date/time&gt;</a:t>
+            </a:r>
+            <a:endParaRPr b="0" lang="en-US" sz="1400" spc="-1" strike="noStrike">
+              <a:latin typeface="Times New Roman"/>
             </a:endParaRPr>
           </a:p>
         </p:txBody>
@@ -3328,7 +3304,7 @@
         <p:spPr>
           <a:xfrm>
             <a:off x="186840" y="178200"/>
-            <a:ext cx="8769960" cy="4757760"/>
+            <a:ext cx="8769600" cy="4757400"/>
           </a:xfrm>
           <a:prstGeom prst="roundRect">
             <a:avLst>
@@ -3366,7 +3342,7 @@
         <p:spPr>
           <a:xfrm>
             <a:off x="460080" y="4445640"/>
-            <a:ext cx="2998800" cy="269280"/>
+            <a:ext cx="2998440" cy="268920"/>
           </a:xfrm>
           <a:prstGeom prst="rect">
             <a:avLst/>
@@ -3432,7 +3408,7 @@
         <p:spPr>
           <a:xfrm>
             <a:off x="2423160" y="4446360"/>
-            <a:ext cx="290880" cy="290880"/>
+            <a:ext cx="290520" cy="290520"/>
           </a:xfrm>
           <a:prstGeom prst="rect">
             <a:avLst/>
@@ -3451,7 +3427,7 @@
         <p:spPr>
           <a:xfrm>
             <a:off x="460080" y="622080"/>
-            <a:ext cx="6925680" cy="3306600"/>
+            <a:ext cx="6925320" cy="3306240"/>
           </a:xfrm>
           <a:prstGeom prst="rect">
             <a:avLst/>
@@ -3507,7 +3483,7 @@
         <p:spPr>
           <a:xfrm>
             <a:off x="5753880" y="2557440"/>
-            <a:ext cx="4009680" cy="3133080"/>
+            <a:ext cx="4009320" cy="3132720"/>
           </a:xfrm>
           <a:prstGeom prst="rect">
             <a:avLst/>
@@ -3560,7 +3536,7 @@
         <p:spPr>
           <a:xfrm>
             <a:off x="5753880" y="2557440"/>
-            <a:ext cx="4009680" cy="3133080"/>
+            <a:ext cx="4009320" cy="3132720"/>
           </a:xfrm>
           <a:prstGeom prst="rect">
             <a:avLst/>
@@ -3579,7 +3555,7 @@
         <p:spPr>
           <a:xfrm>
             <a:off x="185760" y="831240"/>
-            <a:ext cx="899280" cy="899280"/>
+            <a:ext cx="898920" cy="898920"/>
           </a:xfrm>
           <a:prstGeom prst="ellipse">
             <a:avLst/>
@@ -3639,7 +3615,7 @@
         <p:spPr>
           <a:xfrm>
             <a:off x="185760" y="2381400"/>
-            <a:ext cx="899280" cy="887400"/>
+            <a:ext cx="898920" cy="887040"/>
           </a:xfrm>
           <a:prstGeom prst="ellipse">
             <a:avLst/>
@@ -3699,7 +3675,7 @@
         <p:spPr>
           <a:xfrm>
             <a:off x="185760" y="3860640"/>
-            <a:ext cx="899280" cy="899280"/>
+            <a:ext cx="898920" cy="898920"/>
           </a:xfrm>
           <a:prstGeom prst="ellipse">
             <a:avLst/>
@@ -3759,7 +3735,7 @@
         <p:spPr>
           <a:xfrm>
             <a:off x="967680" y="797040"/>
-            <a:ext cx="3764520" cy="550440"/>
+            <a:ext cx="3764160" cy="550080"/>
           </a:xfrm>
           <a:prstGeom prst="rect">
             <a:avLst/>
@@ -3821,7 +3797,7 @@
         <p:spPr>
           <a:xfrm>
             <a:off x="967680" y="1332720"/>
-            <a:ext cx="3764520" cy="789480"/>
+            <a:ext cx="3764160" cy="789120"/>
           </a:xfrm>
           <a:prstGeom prst="rect">
             <a:avLst/>
@@ -3883,7 +3859,7 @@
         <p:spPr>
           <a:xfrm>
             <a:off x="964080" y="2292480"/>
-            <a:ext cx="3764520" cy="550440"/>
+            <a:ext cx="3764160" cy="550080"/>
           </a:xfrm>
           <a:prstGeom prst="rect">
             <a:avLst/>
@@ -3935,7 +3911,7 @@
         <p:spPr>
           <a:xfrm>
             <a:off x="964080" y="2825280"/>
-            <a:ext cx="3764520" cy="843120"/>
+            <a:ext cx="3764160" cy="842760"/>
           </a:xfrm>
           <a:prstGeom prst="rect">
             <a:avLst/>
@@ -3997,7 +3973,7 @@
         <p:spPr>
           <a:xfrm>
             <a:off x="964080" y="3777840"/>
-            <a:ext cx="3764520" cy="550440"/>
+            <a:ext cx="3764160" cy="550080"/>
           </a:xfrm>
           <a:prstGeom prst="rect">
             <a:avLst/>
@@ -4049,7 +4025,7 @@
         <p:spPr>
           <a:xfrm>
             <a:off x="964080" y="4310640"/>
-            <a:ext cx="3764520" cy="794520"/>
+            <a:ext cx="3764160" cy="794160"/>
           </a:xfrm>
           <a:prstGeom prst="rect">
             <a:avLst/>
@@ -4111,7 +4087,7 @@
         <p:spPr>
           <a:xfrm>
             <a:off x="5084640" y="987840"/>
-            <a:ext cx="3687480" cy="3496680"/>
+            <a:ext cx="3687120" cy="3496320"/>
           </a:xfrm>
           <a:prstGeom prst="roundRect">
             <a:avLst>
@@ -4175,7 +4151,7 @@
         <p:spPr>
           <a:xfrm>
             <a:off x="8519760" y="4831560"/>
-            <a:ext cx="484560" cy="226800"/>
+            <a:ext cx="484200" cy="226800"/>
           </a:xfrm>
           <a:prstGeom prst="rect">
             <a:avLst/>
@@ -4227,7 +4203,7 @@
         <p:spPr>
           <a:xfrm>
             <a:off x="421200" y="228600"/>
-            <a:ext cx="8457840" cy="685440"/>
+            <a:ext cx="8457480" cy="685080"/>
           </a:xfrm>
           <a:prstGeom prst="rect">
             <a:avLst/>
@@ -4256,7 +4232,11 @@
             </a:pPr>
             <a:r>
               <a:rPr b="0" lang="en-US" sz="1800" spc="-1" strike="noStrike">
+                <a:solidFill>
+                  <a:srgbClr val="000000"/>
+                </a:solidFill>
                 <a:latin typeface="Arial"/>
+                <a:ea typeface="DejaVu Sans"/>
               </a:rPr>
               <a:t>TITLE</a:t>
             </a:r>
@@ -4305,7 +4285,7 @@
         <p:spPr>
           <a:xfrm>
             <a:off x="506520" y="1484640"/>
-            <a:ext cx="2556720" cy="2055240"/>
+            <a:ext cx="2556360" cy="2054880"/>
           </a:xfrm>
           <a:prstGeom prst="roundRect">
             <a:avLst>
@@ -4345,7 +4325,7 @@
         <p:spPr>
           <a:xfrm>
             <a:off x="624240" y="1616760"/>
-            <a:ext cx="2289600" cy="729000"/>
+            <a:ext cx="2289240" cy="728640"/>
           </a:xfrm>
           <a:prstGeom prst="rect">
             <a:avLst/>
@@ -4397,7 +4377,7 @@
         <p:spPr>
           <a:xfrm>
             <a:off x="624240" y="2400480"/>
-            <a:ext cx="2289600" cy="1162080"/>
+            <a:ext cx="2289240" cy="1161720"/>
           </a:xfrm>
           <a:prstGeom prst="rect">
             <a:avLst/>
@@ -4459,7 +4439,7 @@
         <p:spPr>
           <a:xfrm>
             <a:off x="3309120" y="2066040"/>
-            <a:ext cx="2556720" cy="2055240"/>
+            <a:ext cx="2556360" cy="2054880"/>
           </a:xfrm>
           <a:prstGeom prst="roundRect">
             <a:avLst>
@@ -4499,7 +4479,7 @@
         <p:spPr>
           <a:xfrm>
             <a:off x="3426840" y="2198160"/>
-            <a:ext cx="2289600" cy="729000"/>
+            <a:ext cx="2289240" cy="728640"/>
           </a:xfrm>
           <a:prstGeom prst="rect">
             <a:avLst/>
@@ -4551,7 +4531,7 @@
         <p:spPr>
           <a:xfrm>
             <a:off x="3426840" y="2981880"/>
-            <a:ext cx="2289600" cy="1162080"/>
+            <a:ext cx="2289240" cy="1161720"/>
           </a:xfrm>
           <a:prstGeom prst="rect">
             <a:avLst/>
@@ -4603,7 +4583,7 @@
         <p:spPr>
           <a:xfrm>
             <a:off x="6111720" y="2659320"/>
-            <a:ext cx="2556720" cy="2055240"/>
+            <a:ext cx="2556360" cy="2054880"/>
           </a:xfrm>
           <a:prstGeom prst="roundRect">
             <a:avLst>
@@ -4643,7 +4623,7 @@
         <p:spPr>
           <a:xfrm>
             <a:off x="6229440" y="2791440"/>
-            <a:ext cx="2289600" cy="729000"/>
+            <a:ext cx="2289240" cy="728640"/>
           </a:xfrm>
           <a:prstGeom prst="rect">
             <a:avLst/>
@@ -4678,7 +4658,7 @@
                 <a:latin typeface="Arial"/>
                 <a:ea typeface="DejaVu Sans"/>
               </a:rPr>
-              <a:t>SUBTITLE2</a:t>
+              <a:t>SUBTITLE3</a:t>
             </a:r>
             <a:endParaRPr b="0" lang="en-US" sz="1400" spc="-1" strike="noStrike">
               <a:latin typeface="Arial"/>
@@ -4695,7 +4675,7 @@
         <p:spPr>
           <a:xfrm>
             <a:off x="6229440" y="3574800"/>
-            <a:ext cx="2289600" cy="1162080"/>
+            <a:ext cx="2289240" cy="1161720"/>
           </a:xfrm>
           <a:prstGeom prst="rect">
             <a:avLst/>
@@ -4730,7 +4710,7 @@
                 <a:latin typeface="Arial"/>
                 <a:ea typeface="DejaVu Sans"/>
               </a:rPr>
-              <a:t>TEXT2</a:t>
+              <a:t>TEXT3</a:t>
             </a:r>
             <a:endParaRPr b="0" lang="en-US" sz="1100" spc="-1" strike="noStrike">
               <a:latin typeface="Arial"/>
@@ -4747,7 +4727,7 @@
         <p:spPr>
           <a:xfrm>
             <a:off x="8519760" y="4831560"/>
-            <a:ext cx="484560" cy="226800"/>
+            <a:ext cx="484200" cy="226800"/>
           </a:xfrm>
           <a:prstGeom prst="rect">
             <a:avLst/>
@@ -4799,7 +4779,7 @@
         <p:spPr>
           <a:xfrm>
             <a:off x="457200" y="228600"/>
-            <a:ext cx="8229240" cy="1142640"/>
+            <a:ext cx="8228880" cy="1142280"/>
           </a:xfrm>
           <a:prstGeom prst="rect">
             <a:avLst/>
@@ -4828,7 +4808,11 @@
             </a:pPr>
             <a:r>
               <a:rPr b="0" lang="en-US" sz="1800" spc="-1" strike="noStrike">
+                <a:solidFill>
+                  <a:srgbClr val="000000"/>
+                </a:solidFill>
                 <a:latin typeface="Arial"/>
+                <a:ea typeface="DejaVu Sans"/>
               </a:rPr>
               <a:t>TITLE</a:t>
             </a:r>
@@ -4877,7 +4861,7 @@
         <p:spPr>
           <a:xfrm>
             <a:off x="3601800" y="3271680"/>
-            <a:ext cx="5236200" cy="1320840"/>
+            <a:ext cx="5235840" cy="1320480"/>
           </a:xfrm>
           <a:prstGeom prst="roundRect">
             <a:avLst>
@@ -4915,7 +4899,7 @@
         <p:spPr>
           <a:xfrm>
             <a:off x="6308640" y="1028880"/>
-            <a:ext cx="2532960" cy="2056680"/>
+            <a:ext cx="2532600" cy="2056320"/>
           </a:xfrm>
           <a:prstGeom prst="roundRect">
             <a:avLst>
@@ -4953,7 +4937,7 @@
         <p:spPr>
           <a:xfrm>
             <a:off x="3604320" y="1014480"/>
-            <a:ext cx="2532960" cy="2056680"/>
+            <a:ext cx="2532600" cy="2056320"/>
           </a:xfrm>
           <a:prstGeom prst="roundRect">
             <a:avLst>
@@ -4991,7 +4975,7 @@
         <p:spPr>
           <a:xfrm>
             <a:off x="3696480" y="1059120"/>
-            <a:ext cx="2343240" cy="713520"/>
+            <a:ext cx="2342880" cy="713160"/>
           </a:xfrm>
           <a:prstGeom prst="rect">
             <a:avLst/>
@@ -5053,7 +5037,7 @@
         <p:spPr>
           <a:xfrm>
             <a:off x="3696480" y="1843560"/>
-            <a:ext cx="2343240" cy="1141920"/>
+            <a:ext cx="2342880" cy="1141560"/>
           </a:xfrm>
           <a:prstGeom prst="rect">
             <a:avLst/>
@@ -5115,7 +5099,7 @@
         <p:spPr>
           <a:xfrm>
             <a:off x="6400080" y="1059120"/>
-            <a:ext cx="2340000" cy="713520"/>
+            <a:ext cx="2339640" cy="713160"/>
           </a:xfrm>
           <a:prstGeom prst="rect">
             <a:avLst/>
@@ -5167,7 +5151,7 @@
         <p:spPr>
           <a:xfrm>
             <a:off x="6400080" y="1843560"/>
-            <a:ext cx="2340000" cy="1141920"/>
+            <a:ext cx="2339640" cy="1141560"/>
           </a:xfrm>
           <a:prstGeom prst="rect">
             <a:avLst/>
@@ -5229,7 +5213,7 @@
         <p:spPr>
           <a:xfrm>
             <a:off x="3696480" y="3362040"/>
-            <a:ext cx="5236200" cy="328680"/>
+            <a:ext cx="5235840" cy="328320"/>
           </a:xfrm>
           <a:prstGeom prst="rect">
             <a:avLst/>
@@ -5281,7 +5265,7 @@
         <p:spPr>
           <a:xfrm>
             <a:off x="3696480" y="3713400"/>
-            <a:ext cx="5146560" cy="713520"/>
+            <a:ext cx="5146200" cy="713160"/>
           </a:xfrm>
           <a:prstGeom prst="rect">
             <a:avLst/>
@@ -5343,7 +5327,7 @@
         <p:spPr>
           <a:xfrm>
             <a:off x="384840" y="1028880"/>
-            <a:ext cx="3002400" cy="3564000"/>
+            <a:ext cx="3002040" cy="3563640"/>
           </a:xfrm>
           <a:prstGeom prst="roundRect">
             <a:avLst>
@@ -5407,7 +5391,7 @@
         <p:spPr>
           <a:xfrm>
             <a:off x="8519760" y="4831560"/>
-            <a:ext cx="484560" cy="226800"/>
+            <a:ext cx="484200" cy="226800"/>
           </a:xfrm>
           <a:prstGeom prst="rect">
             <a:avLst/>
@@ -5459,7 +5443,7 @@
         <p:spPr>
           <a:xfrm>
             <a:off x="313200" y="228600"/>
-            <a:ext cx="8457840" cy="685440"/>
+            <a:ext cx="8457480" cy="685080"/>
           </a:xfrm>
           <a:prstGeom prst="rect">
             <a:avLst/>
@@ -5488,7 +5472,11 @@
             </a:pPr>
             <a:r>
               <a:rPr b="0" lang="en-US" sz="1800" spc="-1" strike="noStrike">
+                <a:solidFill>
+                  <a:srgbClr val="000000"/>
+                </a:solidFill>
                 <a:latin typeface="Arial"/>
+                <a:ea typeface="DejaVu Sans"/>
               </a:rPr>
               <a:t>TITLE</a:t>
             </a:r>
@@ -5541,7 +5529,7 @@
         <p:spPr>
           <a:xfrm>
             <a:off x="-877680" y="2245320"/>
-            <a:ext cx="4613040" cy="3604680"/>
+            <a:ext cx="4612680" cy="3604320"/>
           </a:xfrm>
           <a:prstGeom prst="rect">
             <a:avLst/>
@@ -5560,7 +5548,7 @@
         <p:spPr>
           <a:xfrm>
             <a:off x="4157640" y="631080"/>
-            <a:ext cx="899280" cy="899280"/>
+            <a:ext cx="898920" cy="898920"/>
           </a:xfrm>
           <a:prstGeom prst="ellipse">
             <a:avLst/>
@@ -5622,7 +5610,7 @@
         <p:spPr>
           <a:xfrm>
             <a:off x="4157640" y="2127600"/>
-            <a:ext cx="899280" cy="887400"/>
+            <a:ext cx="898920" cy="887040"/>
           </a:xfrm>
           <a:prstGeom prst="ellipse">
             <a:avLst/>
@@ -5684,7 +5672,7 @@
         <p:spPr>
           <a:xfrm>
             <a:off x="4157640" y="3612240"/>
-            <a:ext cx="899280" cy="899280"/>
+            <a:ext cx="898920" cy="898920"/>
           </a:xfrm>
           <a:prstGeom prst="ellipse">
             <a:avLst/>
@@ -5746,7 +5734,7 @@
         <p:spPr>
           <a:xfrm>
             <a:off x="5146560" y="489600"/>
-            <a:ext cx="3578760" cy="550440"/>
+            <a:ext cx="3578400" cy="550080"/>
           </a:xfrm>
           <a:prstGeom prst="rect">
             <a:avLst/>
@@ -5808,7 +5796,7 @@
         <p:spPr>
           <a:xfrm>
             <a:off x="5146560" y="1025280"/>
-            <a:ext cx="3578760" cy="789480"/>
+            <a:ext cx="3578400" cy="789120"/>
           </a:xfrm>
           <a:prstGeom prst="rect">
             <a:avLst/>
@@ -5870,7 +5858,7 @@
         <p:spPr>
           <a:xfrm>
             <a:off x="5142960" y="1985400"/>
-            <a:ext cx="3578760" cy="550440"/>
+            <a:ext cx="3578400" cy="550080"/>
           </a:xfrm>
           <a:prstGeom prst="rect">
             <a:avLst/>
@@ -5922,7 +5910,7 @@
         <p:spPr>
           <a:xfrm>
             <a:off x="5142960" y="2517840"/>
-            <a:ext cx="3578760" cy="843120"/>
+            <a:ext cx="3578400" cy="842760"/>
           </a:xfrm>
           <a:prstGeom prst="rect">
             <a:avLst/>
@@ -5984,7 +5972,7 @@
         <p:spPr>
           <a:xfrm>
             <a:off x="5142960" y="3470760"/>
-            <a:ext cx="3578760" cy="550440"/>
+            <a:ext cx="3578400" cy="550080"/>
           </a:xfrm>
           <a:prstGeom prst="rect">
             <a:avLst/>
@@ -6036,7 +6024,7 @@
         <p:spPr>
           <a:xfrm>
             <a:off x="5142960" y="4003560"/>
-            <a:ext cx="3578760" cy="794520"/>
+            <a:ext cx="3578400" cy="794160"/>
           </a:xfrm>
           <a:prstGeom prst="rect">
             <a:avLst/>
@@ -6098,7 +6086,7 @@
         <p:spPr>
           <a:xfrm>
             <a:off x="8519760" y="4831560"/>
-            <a:ext cx="484560" cy="226800"/>
+            <a:ext cx="484200" cy="226800"/>
           </a:xfrm>
           <a:prstGeom prst="rect">
             <a:avLst/>
@@ -6150,7 +6138,7 @@
         <p:spPr>
           <a:xfrm>
             <a:off x="264600" y="228600"/>
-            <a:ext cx="3657240" cy="2016360"/>
+            <a:ext cx="3656880" cy="2016000"/>
           </a:xfrm>
           <a:prstGeom prst="rect">
             <a:avLst/>
@@ -6179,7 +6167,11 @@
             </a:pPr>
             <a:r>
               <a:rPr b="0" lang="en-US" sz="1800" spc="-1" strike="noStrike">
+                <a:solidFill>
+                  <a:srgbClr val="000000"/>
+                </a:solidFill>
                 <a:latin typeface="Arial"/>
+                <a:ea typeface="DejaVu Sans"/>
               </a:rPr>
               <a:t>TITLE</a:t>
             </a:r>
@@ -6228,7 +6220,7 @@
         <p:spPr>
           <a:xfrm>
             <a:off x="4238640" y="831240"/>
-            <a:ext cx="899280" cy="899280"/>
+            <a:ext cx="898920" cy="898920"/>
           </a:xfrm>
           <a:prstGeom prst="ellipse">
             <a:avLst/>
@@ -6288,7 +6280,7 @@
         <p:spPr>
           <a:xfrm>
             <a:off x="4238640" y="2243880"/>
-            <a:ext cx="899280" cy="887400"/>
+            <a:ext cx="898920" cy="887040"/>
           </a:xfrm>
           <a:prstGeom prst="ellipse">
             <a:avLst/>
@@ -6348,7 +6340,7 @@
         <p:spPr>
           <a:xfrm>
             <a:off x="4238640" y="3667320"/>
-            <a:ext cx="899280" cy="899280"/>
+            <a:ext cx="898920" cy="898920"/>
           </a:xfrm>
           <a:prstGeom prst="ellipse">
             <a:avLst/>
@@ -6408,7 +6400,7 @@
         <p:spPr>
           <a:xfrm>
             <a:off x="5020200" y="797040"/>
-            <a:ext cx="3764520" cy="550440"/>
+            <a:ext cx="3764160" cy="550080"/>
           </a:xfrm>
           <a:prstGeom prst="rect">
             <a:avLst/>
@@ -6470,7 +6462,7 @@
         <p:spPr>
           <a:xfrm>
             <a:off x="5020200" y="1332720"/>
-            <a:ext cx="3764520" cy="789480"/>
+            <a:ext cx="3764160" cy="789120"/>
           </a:xfrm>
           <a:prstGeom prst="rect">
             <a:avLst/>
@@ -6532,7 +6524,7 @@
         <p:spPr>
           <a:xfrm>
             <a:off x="5016600" y="2155320"/>
-            <a:ext cx="3764520" cy="550440"/>
+            <a:ext cx="3764160" cy="550080"/>
           </a:xfrm>
           <a:prstGeom prst="rect">
             <a:avLst/>
@@ -6584,7 +6576,7 @@
         <p:spPr>
           <a:xfrm>
             <a:off x="5016600" y="2687760"/>
-            <a:ext cx="3764520" cy="843120"/>
+            <a:ext cx="3764160" cy="842760"/>
           </a:xfrm>
           <a:prstGeom prst="rect">
             <a:avLst/>
@@ -6646,7 +6638,7 @@
         <p:spPr>
           <a:xfrm>
             <a:off x="5016600" y="3584880"/>
-            <a:ext cx="3764520" cy="550440"/>
+            <a:ext cx="3764160" cy="550080"/>
           </a:xfrm>
           <a:prstGeom prst="rect">
             <a:avLst/>
@@ -6698,7 +6690,7 @@
         <p:spPr>
           <a:xfrm>
             <a:off x="5016600" y="4117320"/>
-            <a:ext cx="3764520" cy="794520"/>
+            <a:ext cx="3764160" cy="794160"/>
           </a:xfrm>
           <a:prstGeom prst="rect">
             <a:avLst/>
@@ -6760,7 +6752,7 @@
         <p:spPr>
           <a:xfrm>
             <a:off x="384840" y="987840"/>
-            <a:ext cx="3687480" cy="3496680"/>
+            <a:ext cx="3687120" cy="3496320"/>
           </a:xfrm>
           <a:prstGeom prst="roundRect">
             <a:avLst>
@@ -6824,7 +6816,7 @@
         <p:spPr>
           <a:xfrm>
             <a:off x="8519760" y="4831560"/>
-            <a:ext cx="484560" cy="226800"/>
+            <a:ext cx="484200" cy="226800"/>
           </a:xfrm>
           <a:prstGeom prst="rect">
             <a:avLst/>
@@ -6876,7 +6868,7 @@
         <p:spPr>
           <a:xfrm>
             <a:off x="300600" y="228600"/>
-            <a:ext cx="8614440" cy="685440"/>
+            <a:ext cx="8614080" cy="685080"/>
           </a:xfrm>
           <a:prstGeom prst="rect">
             <a:avLst/>
@@ -6905,7 +6897,11 @@
             </a:pPr>
             <a:r>
               <a:rPr b="0" lang="en-US" sz="1800" spc="-1" strike="noStrike">
+                <a:solidFill>
+                  <a:srgbClr val="000000"/>
+                </a:solidFill>
                 <a:latin typeface="Arial"/>
+                <a:ea typeface="DejaVu Sans"/>
               </a:rPr>
               <a:t>TITLE</a:t>
             </a:r>
@@ -6954,7 +6950,7 @@
         <p:spPr>
           <a:xfrm>
             <a:off x="186840" y="178200"/>
-            <a:ext cx="8769960" cy="4757760"/>
+            <a:ext cx="8769600" cy="4757400"/>
           </a:xfrm>
           <a:prstGeom prst="roundRect">
             <a:avLst>
@@ -6992,7 +6988,7 @@
         <p:spPr>
           <a:xfrm>
             <a:off x="1640880" y="4489920"/>
-            <a:ext cx="2998800" cy="269280"/>
+            <a:ext cx="2998440" cy="268920"/>
           </a:xfrm>
           <a:prstGeom prst="rect">
             <a:avLst/>
@@ -7054,7 +7050,7 @@
         <p:spPr>
           <a:xfrm>
             <a:off x="867240" y="3488040"/>
-            <a:ext cx="256680" cy="256680"/>
+            <a:ext cx="256320" cy="256320"/>
           </a:xfrm>
           <a:prstGeom prst="ellipse">
             <a:avLst/>
@@ -7089,7 +7085,7 @@
         <p:spPr>
           <a:xfrm>
             <a:off x="351000" y="3691440"/>
-            <a:ext cx="1289160" cy="1133280"/>
+            <a:ext cx="1288800" cy="1132920"/>
           </a:xfrm>
           <a:prstGeom prst="rect">
             <a:avLst/>
@@ -7108,7 +7104,7 @@
         <p:spPr>
           <a:xfrm>
             <a:off x="460080" y="622080"/>
-            <a:ext cx="6925680" cy="3306600"/>
+            <a:ext cx="6925320" cy="3306240"/>
           </a:xfrm>
           <a:prstGeom prst="rect">
             <a:avLst/>
@@ -7164,7 +7160,7 @@
         <p:spPr>
           <a:xfrm>
             <a:off x="5753880" y="2557440"/>
-            <a:ext cx="4009680" cy="3133080"/>
+            <a:ext cx="4009320" cy="3132720"/>
           </a:xfrm>
           <a:prstGeom prst="rect">
             <a:avLst/>
